--- a/S1-CL2-Cloud-Disaster-Recovery/delivery/topic_07/Topic_07_Slides.pptx
+++ b/S1-CL2-Cloud-Disaster-Recovery/delivery/topic_07/Topic_07_Slides.pptx
@@ -3386,7 +3386,7 @@
           <a:noFill/>
         </p:spPr>
         <p:txBody>
-          <a:bodyPr wrap="square" anchor="t" lIns="0" rIns="0" tIns="0" bIns="0">
+          <a:bodyPr wrap="square" anchor="ctr" lIns="0" rIns="0" tIns="0" bIns="0">
             <a:spAutoFit/>
           </a:bodyPr>
           <a:lstStyle/>
@@ -3403,7 +3403,7 @@
               </a:spcAft>
             </a:pPr>
             <a:r>
-              <a:rPr sz="1800" b="1" i="0">
+              <a:rPr sz="2400" b="1" i="0">
                 <a:solidFill>
                   <a:srgbClr val="EDAB0C"/>
                 </a:solidFill>
@@ -3412,7 +3412,7 @@
               <a:t>■  </a:t>
             </a:r>
             <a:r>
-              <a:rPr sz="1800" b="0" i="0">
+              <a:rPr sz="2400" b="0" i="0">
                 <a:solidFill>
                   <a:srgbClr val="2A2929"/>
                 </a:solidFill>
@@ -3434,7 +3434,7 @@
               </a:spcAft>
             </a:pPr>
             <a:r>
-              <a:rPr sz="1800" b="1" i="0">
+              <a:rPr sz="2400" b="1" i="0">
                 <a:solidFill>
                   <a:srgbClr val="EDAB0C"/>
                 </a:solidFill>
@@ -3443,7 +3443,7 @@
               <a:t>■  </a:t>
             </a:r>
             <a:r>
-              <a:rPr sz="1800" b="0" i="0">
+              <a:rPr sz="2400" b="0" i="0">
                 <a:solidFill>
                   <a:srgbClr val="2A2929"/>
                 </a:solidFill>
@@ -3465,7 +3465,7 @@
               </a:spcAft>
             </a:pPr>
             <a:r>
-              <a:rPr sz="1800" b="1" i="0">
+              <a:rPr sz="2400" b="1" i="0">
                 <a:solidFill>
                   <a:srgbClr val="EDAB0C"/>
                 </a:solidFill>
@@ -3474,7 +3474,7 @@
               <a:t>■  </a:t>
             </a:r>
             <a:r>
-              <a:rPr sz="1800" b="0" i="0">
+              <a:rPr sz="2400" b="0" i="0">
                 <a:solidFill>
                   <a:srgbClr val="2A2929"/>
                 </a:solidFill>
@@ -4877,7 +4877,7 @@
           <a:noFill/>
         </p:spPr>
         <p:txBody>
-          <a:bodyPr wrap="square" anchor="t" lIns="0" rIns="0" tIns="0" bIns="0">
+          <a:bodyPr wrap="square" anchor="ctr" lIns="0" rIns="0" tIns="0" bIns="0">
             <a:spAutoFit/>
           </a:bodyPr>
           <a:lstStyle/>
@@ -4894,7 +4894,7 @@
               </a:spcAft>
             </a:pPr>
             <a:r>
-              <a:rPr sz="1800" b="1" i="0">
+              <a:rPr sz="2400" b="1" i="0">
                 <a:solidFill>
                   <a:srgbClr val="EDAB0C"/>
                 </a:solidFill>
@@ -4903,7 +4903,7 @@
               <a:t>■  </a:t>
             </a:r>
             <a:r>
-              <a:rPr sz="1800" b="0" i="0">
+              <a:rPr sz="2400" b="0" i="0">
                 <a:solidFill>
                   <a:srgbClr val="2A2929"/>
                 </a:solidFill>
@@ -4925,7 +4925,7 @@
               </a:spcAft>
             </a:pPr>
             <a:r>
-              <a:rPr sz="1800" b="1" i="0">
+              <a:rPr sz="2400" b="1" i="0">
                 <a:solidFill>
                   <a:srgbClr val="EDAB0C"/>
                 </a:solidFill>
@@ -4934,7 +4934,7 @@
               <a:t>■  </a:t>
             </a:r>
             <a:r>
-              <a:rPr sz="1800" b="0" i="0">
+              <a:rPr sz="2400" b="0" i="0">
                 <a:solidFill>
                   <a:srgbClr val="2A2929"/>
                 </a:solidFill>
@@ -4956,7 +4956,7 @@
               </a:spcAft>
             </a:pPr>
             <a:r>
-              <a:rPr sz="1800" b="1" i="0">
+              <a:rPr sz="2400" b="1" i="0">
                 <a:solidFill>
                   <a:srgbClr val="EDAB0C"/>
                 </a:solidFill>
@@ -4965,7 +4965,7 @@
               <a:t>■  </a:t>
             </a:r>
             <a:r>
-              <a:rPr sz="1800" b="0" i="0">
+              <a:rPr sz="2400" b="0" i="0">
                 <a:solidFill>
                   <a:srgbClr val="2A2929"/>
                 </a:solidFill>
@@ -7221,7 +7221,7 @@
           <a:noFill/>
         </p:spPr>
         <p:txBody>
-          <a:bodyPr wrap="square" anchor="t" lIns="0" rIns="0" tIns="0" bIns="0">
+          <a:bodyPr wrap="square" anchor="ctr" lIns="0" rIns="0" tIns="0" bIns="0">
             <a:spAutoFit/>
           </a:bodyPr>
           <a:lstStyle/>
@@ -7238,7 +7238,7 @@
               </a:spcAft>
             </a:pPr>
             <a:r>
-              <a:rPr sz="1800" b="1" i="0">
+              <a:rPr sz="2400" b="1" i="0">
                 <a:solidFill>
                   <a:srgbClr val="EDAB0C"/>
                 </a:solidFill>
@@ -7247,7 +7247,7 @@
               <a:t>■  </a:t>
             </a:r>
             <a:r>
-              <a:rPr sz="1800" b="0" i="0">
+              <a:rPr sz="2400" b="0" i="0">
                 <a:solidFill>
                   <a:srgbClr val="2A2929"/>
                 </a:solidFill>
@@ -7269,7 +7269,7 @@
               </a:spcAft>
             </a:pPr>
             <a:r>
-              <a:rPr sz="1800" b="1" i="0">
+              <a:rPr sz="2400" b="1" i="0">
                 <a:solidFill>
                   <a:srgbClr val="EDAB0C"/>
                 </a:solidFill>
@@ -7278,7 +7278,7 @@
               <a:t>■  </a:t>
             </a:r>
             <a:r>
-              <a:rPr sz="1800" b="0" i="0">
+              <a:rPr sz="2400" b="0" i="0">
                 <a:solidFill>
                   <a:srgbClr val="2A2929"/>
                 </a:solidFill>
@@ -7300,7 +7300,7 @@
               </a:spcAft>
             </a:pPr>
             <a:r>
-              <a:rPr sz="1800" b="1" i="0">
+              <a:rPr sz="2400" b="1" i="0">
                 <a:solidFill>
                   <a:srgbClr val="EDAB0C"/>
                 </a:solidFill>
@@ -7309,7 +7309,7 @@
               <a:t>■  </a:t>
             </a:r>
             <a:r>
-              <a:rPr sz="1800" b="0" i="0">
+              <a:rPr sz="2400" b="0" i="0">
                 <a:solidFill>
                   <a:srgbClr val="2A2929"/>
                 </a:solidFill>
@@ -7563,7 +7563,7 @@
           <a:noFill/>
         </p:spPr>
         <p:txBody>
-          <a:bodyPr wrap="square" anchor="t" lIns="0" rIns="0" tIns="0" bIns="0">
+          <a:bodyPr wrap="square" anchor="ctr" lIns="0" rIns="0" tIns="0" bIns="0">
             <a:spAutoFit/>
           </a:bodyPr>
           <a:lstStyle/>
@@ -7580,7 +7580,7 @@
               </a:spcAft>
             </a:pPr>
             <a:r>
-              <a:rPr sz="1800" b="1" i="0">
+              <a:rPr sz="2400" b="1" i="0">
                 <a:solidFill>
                   <a:srgbClr val="EDAB0C"/>
                 </a:solidFill>
@@ -7589,7 +7589,7 @@
               <a:t>■  </a:t>
             </a:r>
             <a:r>
-              <a:rPr sz="1800" b="0" i="0">
+              <a:rPr sz="2400" b="0" i="0">
                 <a:solidFill>
                   <a:srgbClr val="2A2929"/>
                 </a:solidFill>
@@ -7611,7 +7611,7 @@
               </a:spcAft>
             </a:pPr>
             <a:r>
-              <a:rPr sz="1800" b="1" i="0">
+              <a:rPr sz="2400" b="1" i="0">
                 <a:solidFill>
                   <a:srgbClr val="EDAB0C"/>
                 </a:solidFill>
@@ -7620,7 +7620,7 @@
               <a:t>■  </a:t>
             </a:r>
             <a:r>
-              <a:rPr sz="1800" b="0" i="0">
+              <a:rPr sz="2400" b="0" i="0">
                 <a:solidFill>
                   <a:srgbClr val="2A2929"/>
                 </a:solidFill>
@@ -7642,7 +7642,7 @@
               </a:spcAft>
             </a:pPr>
             <a:r>
-              <a:rPr sz="1800" b="1" i="0">
+              <a:rPr sz="2400" b="1" i="0">
                 <a:solidFill>
                   <a:srgbClr val="EDAB0C"/>
                 </a:solidFill>
@@ -7651,7 +7651,7 @@
               <a:t>■  </a:t>
             </a:r>
             <a:r>
-              <a:rPr sz="1800" b="0" i="0">
+              <a:rPr sz="2400" b="0" i="0">
                 <a:solidFill>
                   <a:srgbClr val="2A2929"/>
                 </a:solidFill>
@@ -9085,7 +9085,7 @@
           <a:noFill/>
         </p:spPr>
         <p:txBody>
-          <a:bodyPr wrap="square" anchor="t" lIns="0" rIns="0" tIns="0" bIns="0">
+          <a:bodyPr wrap="square" anchor="ctr" lIns="0" rIns="0" tIns="0" bIns="0">
             <a:spAutoFit/>
           </a:bodyPr>
           <a:lstStyle/>
@@ -9102,7 +9102,7 @@
               </a:spcAft>
             </a:pPr>
             <a:r>
-              <a:rPr sz="1800" b="1" i="0">
+              <a:rPr sz="2400" b="1" i="0">
                 <a:solidFill>
                   <a:srgbClr val="EDAB0C"/>
                 </a:solidFill>
@@ -9111,7 +9111,7 @@
               <a:t>■  </a:t>
             </a:r>
             <a:r>
-              <a:rPr sz="1800" b="0" i="0">
+              <a:rPr sz="2400" b="0" i="0">
                 <a:solidFill>
                   <a:srgbClr val="2A2929"/>
                 </a:solidFill>
@@ -9133,7 +9133,7 @@
               </a:spcAft>
             </a:pPr>
             <a:r>
-              <a:rPr sz="1800" b="1" i="0">
+              <a:rPr sz="2400" b="1" i="0">
                 <a:solidFill>
                   <a:srgbClr val="EDAB0C"/>
                 </a:solidFill>
@@ -9142,7 +9142,7 @@
               <a:t>■  </a:t>
             </a:r>
             <a:r>
-              <a:rPr sz="1800" b="0" i="0">
+              <a:rPr sz="2400" b="0" i="0">
                 <a:solidFill>
                   <a:srgbClr val="2A2929"/>
                 </a:solidFill>
@@ -9164,7 +9164,7 @@
               </a:spcAft>
             </a:pPr>
             <a:r>
-              <a:rPr sz="1800" b="1" i="0">
+              <a:rPr sz="2400" b="1" i="0">
                 <a:solidFill>
                   <a:srgbClr val="EDAB0C"/>
                 </a:solidFill>
@@ -9173,7 +9173,7 @@
               <a:t>■  </a:t>
             </a:r>
             <a:r>
-              <a:rPr sz="1800" b="0" i="0">
+              <a:rPr sz="2400" b="0" i="0">
                 <a:solidFill>
                   <a:srgbClr val="2A2929"/>
                 </a:solidFill>

--- a/S1-CL2-Cloud-Disaster-Recovery/delivery/topic_07/Topic_07_Slides.pptx
+++ b/S1-CL2-Cloud-Disaster-Recovery/delivery/topic_07/Topic_07_Slides.pptx
@@ -7,21 +7,21 @@
   <p:sldIdLst>
     <p:sldId id="256" r:id="rId7"/>
     <p:sldId id="257" r:id="rId8"/>
-    <p:sldId id="258" r:id="rId9"/>
-    <p:sldId id="259" r:id="rId10"/>
-    <p:sldId id="260" r:id="rId11"/>
-    <p:sldId id="261" r:id="rId12"/>
-    <p:sldId id="262" r:id="rId13"/>
-    <p:sldId id="263" r:id="rId14"/>
-    <p:sldId id="264" r:id="rId15"/>
-    <p:sldId id="265" r:id="rId16"/>
-    <p:sldId id="266" r:id="rId17"/>
-    <p:sldId id="267" r:id="rId18"/>
-    <p:sldId id="268" r:id="rId19"/>
-    <p:sldId id="269" r:id="rId20"/>
-    <p:sldId id="270" r:id="rId21"/>
-    <p:sldId id="271" r:id="rId22"/>
-    <p:sldId id="272" r:id="rId23"/>
+    <p:sldId id="258" r:id="rId10"/>
+    <p:sldId id="259" r:id="rId11"/>
+    <p:sldId id="260" r:id="rId12"/>
+    <p:sldId id="261" r:id="rId13"/>
+    <p:sldId id="262" r:id="rId14"/>
+    <p:sldId id="263" r:id="rId15"/>
+    <p:sldId id="264" r:id="rId16"/>
+    <p:sldId id="265" r:id="rId17"/>
+    <p:sldId id="266" r:id="rId18"/>
+    <p:sldId id="267" r:id="rId19"/>
+    <p:sldId id="268" r:id="rId20"/>
+    <p:sldId id="269" r:id="rId21"/>
+    <p:sldId id="270" r:id="rId22"/>
+    <p:sldId id="271" r:id="rId23"/>
+    <p:sldId id="272" r:id="rId24"/>
   </p:sldIdLst>
   <p:sldSz cx="12191695" cy="6858000" type="screen4x3"/>
   <p:notesSz cx="6858000" cy="9144000"/>
@@ -121,6 +121,1954 @@
     </a:lvl9pPr>
   </p:defaultTextStyle>
 </p:presentation>
+</file>
+
+<file path=ppt/notesMasters/notesMaster1.xml><?xml version="1.0" encoding="utf-8"?>
+<p:notesMaster xmlns:a="http://schemas.openxmlformats.org/drawingml/2006/main" xmlns:p="http://schemas.openxmlformats.org/presentationml/2006/main" xmlns:r="http://schemas.openxmlformats.org/officeDocument/2006/relationships">
+  <p:cSld>
+    <p:bg>
+      <p:bgRef idx="1001">
+        <a:schemeClr val="bg1"/>
+      </p:bgRef>
+    </p:bg>
+    <p:spTree>
+      <p:nvGrpSpPr>
+        <p:cNvPr id="1" name=""/>
+        <p:cNvGrpSpPr/>
+        <p:nvPr/>
+      </p:nvGrpSpPr>
+      <p:grpSpPr>
+        <a:xfrm>
+          <a:off x="0" y="0"/>
+          <a:ext cx="0" cy="0"/>
+          <a:chOff x="0" y="0"/>
+          <a:chExt cx="0" cy="0"/>
+        </a:xfrm>
+      </p:grpSpPr>
+      <p:sp>
+        <p:nvSpPr>
+          <p:cNvPr id="2" name="Header Placeholder 1"/>
+          <p:cNvSpPr>
+            <a:spLocks noGrp="1"/>
+          </p:cNvSpPr>
+          <p:nvPr>
+            <p:ph type="hdr" sz="quarter"/>
+          </p:nvPr>
+        </p:nvSpPr>
+        <p:spPr>
+          <a:xfrm>
+            <a:off x="0" y="0"/>
+            <a:ext cx="2971800" cy="457200"/>
+          </a:xfrm>
+          <a:prstGeom prst="rect">
+            <a:avLst/>
+          </a:prstGeom>
+        </p:spPr>
+        <p:txBody>
+          <a:bodyPr vert="horz" lIns="91440" tIns="45720" rIns="91440" bIns="45720" rtlCol="0"/>
+          <a:lstStyle>
+            <a:lvl1pPr algn="l">
+              <a:defRPr sz="1200"/>
+            </a:lvl1pPr>
+          </a:lstStyle>
+          <a:p>
+            <a:endParaRPr lang="en-US"/>
+          </a:p>
+        </p:txBody>
+      </p:sp>
+      <p:sp>
+        <p:nvSpPr>
+          <p:cNvPr id="3" name="Date Placeholder 2"/>
+          <p:cNvSpPr>
+            <a:spLocks noGrp="1"/>
+          </p:cNvSpPr>
+          <p:nvPr>
+            <p:ph type="dt" idx="1"/>
+          </p:nvPr>
+        </p:nvSpPr>
+        <p:spPr>
+          <a:xfrm>
+            <a:off x="3884613" y="0"/>
+            <a:ext cx="2971800" cy="457200"/>
+          </a:xfrm>
+          <a:prstGeom prst="rect">
+            <a:avLst/>
+          </a:prstGeom>
+        </p:spPr>
+        <p:txBody>
+          <a:bodyPr vert="horz" lIns="91440" tIns="45720" rIns="91440" bIns="45720" rtlCol="0"/>
+          <a:lstStyle>
+            <a:lvl1pPr algn="r">
+              <a:defRPr sz="1200"/>
+            </a:lvl1pPr>
+          </a:lstStyle>
+          <a:p>
+            <a:fld id="{0F89C1C7-3DCD-1040-A9CF-14679D8B5DDD}" type="datetimeFigureOut">
+              <a:rPr lang="en-US" smtClean="0"/>
+              <a:t>10/17/16</a:t>
+            </a:fld>
+            <a:endParaRPr lang="en-US"/>
+          </a:p>
+        </p:txBody>
+      </p:sp>
+      <p:sp>
+        <p:nvSpPr>
+          <p:cNvPr id="4" name="Slide Image Placeholder 3"/>
+          <p:cNvSpPr>
+            <a:spLocks noGrp="1" noRot="1" noChangeAspect="1"/>
+          </p:cNvSpPr>
+          <p:nvPr>
+            <p:ph type="sldImg" idx="2"/>
+          </p:nvPr>
+        </p:nvSpPr>
+        <p:spPr>
+          <a:xfrm>
+            <a:off x="1143000" y="685800"/>
+            <a:ext cx="4572000" cy="3429000"/>
+          </a:xfrm>
+          <a:prstGeom prst="rect">
+            <a:avLst/>
+          </a:prstGeom>
+          <a:noFill/>
+          <a:ln w="12700">
+            <a:solidFill>
+              <a:prstClr val="black"/>
+            </a:solidFill>
+          </a:ln>
+        </p:spPr>
+        <p:txBody>
+          <a:bodyPr vert="horz" lIns="91440" tIns="45720" rIns="91440" bIns="45720" rtlCol="0" anchor="ctr"/>
+          <a:lstStyle/>
+          <a:p>
+            <a:endParaRPr lang="en-US"/>
+          </a:p>
+        </p:txBody>
+      </p:sp>
+      <p:sp>
+        <p:nvSpPr>
+          <p:cNvPr id="5" name="Notes Placeholder 4"/>
+          <p:cNvSpPr>
+            <a:spLocks noGrp="1"/>
+          </p:cNvSpPr>
+          <p:nvPr>
+            <p:ph type="body" sz="quarter" idx="3"/>
+          </p:nvPr>
+        </p:nvSpPr>
+        <p:spPr>
+          <a:xfrm>
+            <a:off x="685800" y="4343400"/>
+            <a:ext cx="5486400" cy="4114800"/>
+          </a:xfrm>
+          <a:prstGeom prst="rect">
+            <a:avLst/>
+          </a:prstGeom>
+        </p:spPr>
+        <p:txBody>
+          <a:bodyPr vert="horz" lIns="91440" tIns="45720" rIns="91440" bIns="45720" rtlCol="0"/>
+          <a:lstStyle/>
+          <a:p>
+            <a:pPr lvl="0"/>
+            <a:r>
+              <a:rPr lang="en-US" smtClean="0"/>
+              <a:t>Click to edit Master text styles</a:t>
+            </a:r>
+          </a:p>
+          <a:p>
+            <a:pPr lvl="1"/>
+            <a:r>
+              <a:rPr lang="en-US" smtClean="0"/>
+              <a:t>Second level</a:t>
+            </a:r>
+          </a:p>
+          <a:p>
+            <a:pPr lvl="2"/>
+            <a:r>
+              <a:rPr lang="en-US" smtClean="0"/>
+              <a:t>Third level</a:t>
+            </a:r>
+          </a:p>
+          <a:p>
+            <a:pPr lvl="3"/>
+            <a:r>
+              <a:rPr lang="en-US" smtClean="0"/>
+              <a:t>Fourth level</a:t>
+            </a:r>
+          </a:p>
+          <a:p>
+            <a:pPr lvl="4"/>
+            <a:r>
+              <a:rPr lang="en-US" smtClean="0"/>
+              <a:t>Fifth level</a:t>
+            </a:r>
+            <a:endParaRPr lang="en-US"/>
+          </a:p>
+        </p:txBody>
+      </p:sp>
+      <p:sp>
+        <p:nvSpPr>
+          <p:cNvPr id="6" name="Footer Placeholder 5"/>
+          <p:cNvSpPr>
+            <a:spLocks noGrp="1"/>
+          </p:cNvSpPr>
+          <p:nvPr>
+            <p:ph type="ftr" sz="quarter" idx="4"/>
+          </p:nvPr>
+        </p:nvSpPr>
+        <p:spPr>
+          <a:xfrm>
+            <a:off x="0" y="8685213"/>
+            <a:ext cx="2971800" cy="457200"/>
+          </a:xfrm>
+          <a:prstGeom prst="rect">
+            <a:avLst/>
+          </a:prstGeom>
+        </p:spPr>
+        <p:txBody>
+          <a:bodyPr vert="horz" lIns="91440" tIns="45720" rIns="91440" bIns="45720" rtlCol="0" anchor="b"/>
+          <a:lstStyle>
+            <a:lvl1pPr algn="l">
+              <a:defRPr sz="1200"/>
+            </a:lvl1pPr>
+          </a:lstStyle>
+          <a:p>
+            <a:endParaRPr lang="en-US"/>
+          </a:p>
+        </p:txBody>
+      </p:sp>
+      <p:sp>
+        <p:nvSpPr>
+          <p:cNvPr id="7" name="Slide Number Placeholder 6"/>
+          <p:cNvSpPr>
+            <a:spLocks noGrp="1"/>
+          </p:cNvSpPr>
+          <p:nvPr>
+            <p:ph type="sldNum" sz="quarter" idx="5"/>
+          </p:nvPr>
+        </p:nvSpPr>
+        <p:spPr>
+          <a:xfrm>
+            <a:off x="3884613" y="8685213"/>
+            <a:ext cx="2971800" cy="457200"/>
+          </a:xfrm>
+          <a:prstGeom prst="rect">
+            <a:avLst/>
+          </a:prstGeom>
+        </p:spPr>
+        <p:txBody>
+          <a:bodyPr vert="horz" lIns="91440" tIns="45720" rIns="91440" bIns="45720" rtlCol="0" anchor="b"/>
+          <a:lstStyle>
+            <a:lvl1pPr algn="r">
+              <a:defRPr sz="1200"/>
+            </a:lvl1pPr>
+          </a:lstStyle>
+          <a:p>
+            <a:fld id="{BB5E49A5-4136-284D-997B-48E1D791AD67}" type="slidenum">
+              <a:rPr lang="en-US" smtClean="0"/>
+              <a:t>‹#›</a:t>
+            </a:fld>
+            <a:endParaRPr lang="en-US"/>
+          </a:p>
+        </p:txBody>
+      </p:sp>
+    </p:spTree>
+    <p:extLst>
+      <p:ext uri="{BB962C8B-B14F-4D97-AF65-F5344CB8AC3E}">
+        <p14:creationId xmlns:p14="http://schemas.microsoft.com/office/powerpoint/2010/main" val="2623252185"/>
+      </p:ext>
+    </p:extLst>
+  </p:cSld>
+  <p:clrMap bg1="lt1" tx1="dk1" bg2="lt2" tx2="dk2" accent1="accent1" accent2="accent2" accent3="accent3" accent4="accent4" accent5="accent5" accent6="accent6" hlink="hlink" folHlink="folHlink"/>
+  <p:notesStyle>
+    <a:lvl1pPr marL="0" algn="l" defTabSz="457200" rtl="0" eaLnBrk="1" latinLnBrk="0" hangingPunct="1">
+      <a:defRPr sz="1200" kern="1200">
+        <a:solidFill>
+          <a:schemeClr val="tx1"/>
+        </a:solidFill>
+        <a:latin typeface="+mn-lt"/>
+        <a:ea typeface="+mn-ea"/>
+        <a:cs typeface="+mn-cs"/>
+      </a:defRPr>
+    </a:lvl1pPr>
+    <a:lvl2pPr marL="457200" algn="l" defTabSz="457200" rtl="0" eaLnBrk="1" latinLnBrk="0" hangingPunct="1">
+      <a:defRPr sz="1200" kern="1200">
+        <a:solidFill>
+          <a:schemeClr val="tx1"/>
+        </a:solidFill>
+        <a:latin typeface="+mn-lt"/>
+        <a:ea typeface="+mn-ea"/>
+        <a:cs typeface="+mn-cs"/>
+      </a:defRPr>
+    </a:lvl2pPr>
+    <a:lvl3pPr marL="914400" algn="l" defTabSz="457200" rtl="0" eaLnBrk="1" latinLnBrk="0" hangingPunct="1">
+      <a:defRPr sz="1200" kern="1200">
+        <a:solidFill>
+          <a:schemeClr val="tx1"/>
+        </a:solidFill>
+        <a:latin typeface="+mn-lt"/>
+        <a:ea typeface="+mn-ea"/>
+        <a:cs typeface="+mn-cs"/>
+      </a:defRPr>
+    </a:lvl3pPr>
+    <a:lvl4pPr marL="1371600" algn="l" defTabSz="457200" rtl="0" eaLnBrk="1" latinLnBrk="0" hangingPunct="1">
+      <a:defRPr sz="1200" kern="1200">
+        <a:solidFill>
+          <a:schemeClr val="tx1"/>
+        </a:solidFill>
+        <a:latin typeface="+mn-lt"/>
+        <a:ea typeface="+mn-ea"/>
+        <a:cs typeface="+mn-cs"/>
+      </a:defRPr>
+    </a:lvl4pPr>
+    <a:lvl5pPr marL="1828800" algn="l" defTabSz="457200" rtl="0" eaLnBrk="1" latinLnBrk="0" hangingPunct="1">
+      <a:defRPr sz="1200" kern="1200">
+        <a:solidFill>
+          <a:schemeClr val="tx1"/>
+        </a:solidFill>
+        <a:latin typeface="+mn-lt"/>
+        <a:ea typeface="+mn-ea"/>
+        <a:cs typeface="+mn-cs"/>
+      </a:defRPr>
+    </a:lvl5pPr>
+    <a:lvl6pPr marL="2286000" algn="l" defTabSz="457200" rtl="0" eaLnBrk="1" latinLnBrk="0" hangingPunct="1">
+      <a:defRPr sz="1200" kern="1200">
+        <a:solidFill>
+          <a:schemeClr val="tx1"/>
+        </a:solidFill>
+        <a:latin typeface="+mn-lt"/>
+        <a:ea typeface="+mn-ea"/>
+        <a:cs typeface="+mn-cs"/>
+      </a:defRPr>
+    </a:lvl6pPr>
+    <a:lvl7pPr marL="2743200" algn="l" defTabSz="457200" rtl="0" eaLnBrk="1" latinLnBrk="0" hangingPunct="1">
+      <a:defRPr sz="1200" kern="1200">
+        <a:solidFill>
+          <a:schemeClr val="tx1"/>
+        </a:solidFill>
+        <a:latin typeface="+mn-lt"/>
+        <a:ea typeface="+mn-ea"/>
+        <a:cs typeface="+mn-cs"/>
+      </a:defRPr>
+    </a:lvl7pPr>
+    <a:lvl8pPr marL="3200400" algn="l" defTabSz="457200" rtl="0" eaLnBrk="1" latinLnBrk="0" hangingPunct="1">
+      <a:defRPr sz="1200" kern="1200">
+        <a:solidFill>
+          <a:schemeClr val="tx1"/>
+        </a:solidFill>
+        <a:latin typeface="+mn-lt"/>
+        <a:ea typeface="+mn-ea"/>
+        <a:cs typeface="+mn-cs"/>
+      </a:defRPr>
+    </a:lvl8pPr>
+    <a:lvl9pPr marL="3657600" algn="l" defTabSz="457200" rtl="0" eaLnBrk="1" latinLnBrk="0" hangingPunct="1">
+      <a:defRPr sz="1200" kern="1200">
+        <a:solidFill>
+          <a:schemeClr val="tx1"/>
+        </a:solidFill>
+        <a:latin typeface="+mn-lt"/>
+        <a:ea typeface="+mn-ea"/>
+        <a:cs typeface="+mn-cs"/>
+      </a:defRPr>
+    </a:lvl9pPr>
+  </p:notesStyle>
+</p:notesMaster>
+</file>
+
+<file path=ppt/notesSlides/notesSlide1.xml><?xml version="1.0" encoding="utf-8"?>
+<p:notes xmlns:a="http://schemas.openxmlformats.org/drawingml/2006/main" xmlns:p="http://schemas.openxmlformats.org/presentationml/2006/main" xmlns:r="http://schemas.openxmlformats.org/officeDocument/2006/relationships">
+  <p:cSld>
+    <p:spTree>
+      <p:nvGrpSpPr>
+        <p:cNvPr id="1" name=""/>
+        <p:cNvGrpSpPr/>
+        <p:nvPr/>
+      </p:nvGrpSpPr>
+      <p:grpSpPr>
+        <a:xfrm>
+          <a:off x="0" y="0"/>
+          <a:ext cx="0" cy="0"/>
+          <a:chOff x="0" y="0"/>
+          <a:chExt cx="0" cy="0"/>
+        </a:xfrm>
+      </p:grpSpPr>
+      <p:sp>
+        <p:nvSpPr>
+          <p:cNvPr id="2" name="Slide Image Placeholder 1"/>
+          <p:cNvSpPr>
+            <a:spLocks noGrp="1"/>
+          </p:cNvSpPr>
+          <p:nvPr>
+            <p:ph type="sldImg" idx="2"/>
+          </p:nvPr>
+        </p:nvSpPr>
+        <p:spPr/>
+      </p:sp>
+      <p:sp>
+        <p:nvSpPr>
+          <p:cNvPr id="3" name="Notes Placeholder 2"/>
+          <p:cNvSpPr>
+            <a:spLocks noGrp="1"/>
+          </p:cNvSpPr>
+          <p:nvPr>
+            <p:ph type="body" idx="3" sz="quarter"/>
+          </p:nvPr>
+        </p:nvSpPr>
+        <p:spPr/>
+        <p:txBody>
+          <a:bodyPr/>
+          <a:lstStyle/>
+          <a:p>
+            <a:r>
+              <a:t>Frame Topic 7 as the step up from Topic 6 — you operated a template someone else wrote; now you AUTHOR</a:t>
+            </a:r>
+          </a:p>
+          <a:p>
+            <a:r>
+              <a:t>your own. Set the mode; don't teach syntax yet.</a:t>
+            </a:r>
+          </a:p>
+          <a:p>
+            <a:r>
+              <a:t>• First bullet: Topic 6 operated a PROVIDED template; now you write your OWN from scratch. The skill</a:t>
+            </a:r>
+          </a:p>
+          <a:p>
+            <a:r>
+              <a:t>shifts from reading to producing.</a:t>
+            </a:r>
+          </a:p>
+          <a:p>
+            <a:r>
+              <a:t>• Second bullet: same tooling and lifecycle as Topic 6 — this time YOU declare the resources and their</a:t>
+            </a:r>
+          </a:p>
+          <a:p>
+            <a:r>
+              <a:t>relationships, rather than reading someone else's declarations.</a:t>
+            </a:r>
+          </a:p>
+          <a:p>
+            <a:r>
+              <a:t>• Third bullet: still deploy to us-east-1 in the lab — [scenario: ap-southeast-2 (Sydney) | deploy:</a:t>
+            </a:r>
+          </a:p>
+          <a:p>
+            <a:r>
+              <a:t>us-east-1]. The substitution convention carries over unchanged.</a:t>
+            </a:r>
+          </a:p>
+          <a:p>
+            <a:r>
+              <a:t>• Fourth bullet (why it matters): this is the skill you APPLY in Topic 8 to build the microservice</a:t>
+            </a:r>
+          </a:p>
+          <a:p>
+            <a:r>
+              <a:t>template. Today is the general skill; Topic 8 is the real artefact.</a:t>
+            </a:r>
+          </a:p>
+          <a:p>
+            <a:r>
+              <a:t>Misconception to pre-empt: "authoring is just editing the provided template." No — you start from the</a:t>
+            </a:r>
+          </a:p>
+          <a:p>
+            <a:r>
+              <a:t>OUTCOME (what resources, what relationships) and declare them yourself; editing someone else's is still</a:t>
+            </a:r>
+          </a:p>
+          <a:p>
+            <a:r>
+              <a:t>operating, not authoring.</a:t>
+            </a:r>
+          </a:p>
+          <a:p>
+            <a:r>
+              <a:t>Question to pose: "When you write a template from scratch, what do you decide that you only READ in</a:t>
+            </a:r>
+          </a:p>
+          <a:p>
+            <a:r>
+              <a:t>Topic 6?" (the resources, their dependencies, the parameters and outputs — the design of the template).</a:t>
+            </a:r>
+          </a:p>
+          <a:p>
+            <a:r>
+              <a:t>UoC/AT2 tie: opens the author-your-own arc — ICTCLD505 element 3 (PE 2, at least one own template) →</a:t>
+            </a:r>
+          </a:p>
+          <a:p>
+            <a:r>
+              <a:t>AT2 §4.3 (the student's own microservice template).</a:t>
+            </a:r>
+          </a:p>
+        </p:txBody>
+      </p:sp>
+      <p:sp>
+        <p:nvSpPr>
+          <p:cNvPr id="4" name="Slide Number Placeholder 3"/>
+          <p:cNvSpPr>
+            <a:spLocks noGrp="1"/>
+          </p:cNvSpPr>
+          <p:nvPr>
+            <p:ph type="sldNum" idx="5" sz="quarter"/>
+          </p:nvPr>
+        </p:nvSpPr>
+        <p:spPr/>
+      </p:sp>
+    </p:spTree>
+  </p:cSld>
+  <p:clrMapOvr>
+    <a:masterClrMapping/>
+  </p:clrMapOvr>
+</p:notes>
+</file>
+
+<file path=ppt/notesSlides/notesSlide10.xml><?xml version="1.0" encoding="utf-8"?>
+<p:notes xmlns:a="http://schemas.openxmlformats.org/drawingml/2006/main" xmlns:p="http://schemas.openxmlformats.org/presentationml/2006/main" xmlns:r="http://schemas.openxmlformats.org/officeDocument/2006/relationships">
+  <p:cSld>
+    <p:spTree>
+      <p:nvGrpSpPr>
+        <p:cNvPr id="1" name=""/>
+        <p:cNvGrpSpPr/>
+        <p:nvPr/>
+      </p:nvGrpSpPr>
+      <p:grpSpPr>
+        <a:xfrm>
+          <a:off x="0" y="0"/>
+          <a:ext cx="0" cy="0"/>
+          <a:chOff x="0" y="0"/>
+          <a:chExt cx="0" cy="0"/>
+        </a:xfrm>
+      </p:grpSpPr>
+      <p:sp>
+        <p:nvSpPr>
+          <p:cNvPr id="2" name="Slide Image Placeholder 1"/>
+          <p:cNvSpPr>
+            <a:spLocks noGrp="1"/>
+          </p:cNvSpPr>
+          <p:nvPr>
+            <p:ph type="sldImg" idx="2"/>
+          </p:nvPr>
+        </p:nvSpPr>
+        <p:spPr/>
+      </p:sp>
+      <p:sp>
+        <p:nvSpPr>
+          <p:cNvPr id="3" name="Notes Placeholder 2"/>
+          <p:cNvSpPr>
+            <a:spLocks noGrp="1"/>
+          </p:cNvSpPr>
+          <p:nvPr>
+            <p:ph type="body" idx="3" sz="quarter"/>
+          </p:nvPr>
+        </p:nvSpPr>
+        <p:spPr/>
+        <p:txBody>
+          <a:bodyPr/>
+          <a:lstStyle/>
+          <a:p>
+            <a:r>
+              <a:t>Bespoke — the two C3 skills: clean removal and troubleshooting your OWN template. Close the lifecycle.</a:t>
+            </a:r>
+          </a:p>
+          <a:p>
+            <a:r>
+              <a:t>• First bullet: remove the deployed resources and DELETE the template cleanly — no orphaned resources, no</a:t>
+            </a:r>
+          </a:p>
+          <a:p>
+            <a:r>
+              <a:t>lingering cost. Deleting the stack should leave nothing behind.</a:t>
+            </a:r>
+          </a:p>
+          <a:p>
+            <a:r>
+              <a:t>• Second bullet: test and troubleshoot errors in your OWN template — read the event, diagnose, fix,</a:t>
+            </a:r>
+          </a:p>
+          <a:p>
+            <a:r>
+              <a:t>redeploy (the Topic 6 method, now on code you wrote).</a:t>
+            </a:r>
+          </a:p>
+          <a:p>
+            <a:r>
+              <a:t>• Third bullet (the encouragement): your own bugs are the best teacher — a bad !Ref or property tells you</a:t>
+            </a:r>
+          </a:p>
+          <a:p>
+            <a:r>
+              <a:t>exactly what to fix. Debugging your own template is how the skill sticks.</a:t>
+            </a:r>
+          </a:p>
+          <a:p>
+            <a:r>
+              <a:t>Misconception to pre-empt: "if a delete fails, just leave it — it's gone from my view." No — orphaned</a:t>
+            </a:r>
+          </a:p>
+          <a:p>
+            <a:r>
+              <a:t>resources keep costing money and can block a rebuild; confirm the delete actually removed everything.</a:t>
+            </a:r>
+          </a:p>
+          <a:p>
+            <a:r>
+              <a:t>Question to pose: "You delete your stack but a resource lingers — why does that matter, and what do you</a:t>
+            </a:r>
+          </a:p>
+          <a:p>
+            <a:r>
+              <a:t>check?" (ongoing cost / clashes on rebuild; check the delete events and the console for orphans).</a:t>
+            </a:r>
+          </a:p>
+          <a:p>
+            <a:r>
+              <a:t>UoC/AT2 tie: ICTCLD505 PC 3.6 (remove resources; delete templates) + PC 3.7 (troubleshoot own template</a:t>
+            </a:r>
+          </a:p>
+          <a:p>
+            <a:r>
+              <a:t>errors) + PE 2 → AT2 §4.3 (D3).</a:t>
+            </a:r>
+          </a:p>
+        </p:txBody>
+      </p:sp>
+      <p:sp>
+        <p:nvSpPr>
+          <p:cNvPr id="4" name="Slide Number Placeholder 3"/>
+          <p:cNvSpPr>
+            <a:spLocks noGrp="1"/>
+          </p:cNvSpPr>
+          <p:nvPr>
+            <p:ph type="sldNum" idx="5" sz="quarter"/>
+          </p:nvPr>
+        </p:nvSpPr>
+        <p:spPr/>
+      </p:sp>
+    </p:spTree>
+  </p:cSld>
+  <p:clrMapOvr>
+    <a:masterClrMapping/>
+  </p:clrMapOvr>
+</p:notes>
+</file>
+
+<file path=ppt/notesSlides/notesSlide11.xml><?xml version="1.0" encoding="utf-8"?>
+<p:notes xmlns:a="http://schemas.openxmlformats.org/drawingml/2006/main" xmlns:p="http://schemas.openxmlformats.org/presentationml/2006/main" xmlns:r="http://schemas.openxmlformats.org/officeDocument/2006/relationships">
+  <p:cSld>
+    <p:spTree>
+      <p:nvGrpSpPr>
+        <p:cNvPr id="1" name=""/>
+        <p:cNvGrpSpPr/>
+        <p:nvPr/>
+      </p:nvGrpSpPr>
+      <p:grpSpPr>
+        <a:xfrm>
+          <a:off x="0" y="0"/>
+          <a:ext cx="0" cy="0"/>
+          <a:chOff x="0" y="0"/>
+          <a:chExt cx="0" cy="0"/>
+        </a:xfrm>
+      </p:grpSpPr>
+      <p:sp>
+        <p:nvSpPr>
+          <p:cNvPr id="2" name="Slide Image Placeholder 1"/>
+          <p:cNvSpPr>
+            <a:spLocks noGrp="1"/>
+          </p:cNvSpPr>
+          <p:nvPr>
+            <p:ph type="sldImg" idx="2"/>
+          </p:nvPr>
+        </p:nvSpPr>
+        <p:spPr/>
+      </p:sp>
+      <p:sp>
+        <p:nvSpPr>
+          <p:cNvPr id="3" name="Notes Placeholder 2"/>
+          <p:cNvSpPr>
+            <a:spLocks noGrp="1"/>
+          </p:cNvSpPr>
+          <p:nvPr>
+            <p:ph type="body" idx="3" sz="quarter"/>
+          </p:nvPr>
+        </p:nvSpPr>
+        <p:spPr/>
+        <p:txBody>
+          <a:bodyPr/>
+          <a:lstStyle/>
+          <a:p>
+            <a:r>
+              <a:t>Facilitation — the C3 practice; students introduce and fix an error in their own template, then remove</a:t>
+            </a:r>
+          </a:p>
+          <a:p>
+            <a:r>
+              <a:t>the stack cleanly. Closes the author-your-own lifecycle.</a:t>
+            </a:r>
+          </a:p>
+          <a:p>
+            <a:r>
+              <a:t>Tell students, in these words: "On the practice scenario, introduce and fix a template error, then remove</a:t>
+            </a:r>
+          </a:p>
+          <a:p>
+            <a:r>
+              <a:t>the stack cleanly."</a:t>
+            </a:r>
+          </a:p>
+          <a:p>
+            <a:r>
+              <a:t>Steps (put on the board):</a:t>
+            </a:r>
+          </a:p>
+          <a:p>
+            <a:r>
+              <a:t>1. Introduce a deliberate error into your own template (e.g. a bad !Ref or an invalid property).</a:t>
+            </a:r>
+          </a:p>
+          <a:p>
+            <a:r>
+              <a:t>2. Deploy; read the first CREATE_FAILED event; diagnose and fix; redeploy to success.</a:t>
+            </a:r>
+          </a:p>
+          <a:p>
+            <a:r>
+              <a:t>3. Remove the stack cleanly; confirm no resources are left behind.</a:t>
+            </a:r>
+          </a:p>
+          <a:p>
+            <a:r>
+              <a:t>Must produce: a template broken and fixed by its author, then a clean teardown with no orphaned</a:t>
+            </a:r>
+          </a:p>
+          <a:p>
+            <a:r>
+              <a:t>resources.</a:t>
+            </a:r>
+          </a:p>
+          <a:p>
+            <a:r>
+              <a:t>Timing: ~20 min. Where they get stuck: fixing by trial-and-error instead of reading the first failure;</a:t>
+            </a:r>
+          </a:p>
+          <a:p>
+            <a:r>
+              <a:t>and assuming delete worked — make them confirm the teardown in the console.</a:t>
+            </a:r>
+          </a:p>
+          <a:p>
+            <a:r>
+              <a:t>Share-back prompt: "What error did you plant, how did the event tell you, and did your teardown leave</a:t>
+            </a:r>
+          </a:p>
+          <a:p>
+            <a:r>
+              <a:t>anything behind?"</a:t>
+            </a:r>
+          </a:p>
+          <a:p>
+            <a:r>
+              <a:t>No-leakage note: practice scenario — AT2 §4.3 assesses troubleshooting + clean removal on the student's</a:t>
+            </a:r>
+          </a:p>
+          <a:p>
+            <a:r>
+              <a:t>own microservice template (comparable, not identical).</a:t>
+            </a:r>
+          </a:p>
+        </p:txBody>
+      </p:sp>
+      <p:sp>
+        <p:nvSpPr>
+          <p:cNvPr id="4" name="Slide Number Placeholder 3"/>
+          <p:cNvSpPr>
+            <a:spLocks noGrp="1"/>
+          </p:cNvSpPr>
+          <p:nvPr>
+            <p:ph type="sldNum" idx="5" sz="quarter"/>
+          </p:nvPr>
+        </p:nvSpPr>
+        <p:spPr/>
+      </p:sp>
+    </p:spTree>
+  </p:cSld>
+  <p:clrMapOvr>
+    <a:masterClrMapping/>
+  </p:clrMapOvr>
+</p:notes>
+</file>
+
+<file path=ppt/notesSlides/notesSlide2.xml><?xml version="1.0" encoding="utf-8"?>
+<p:notes xmlns:a="http://schemas.openxmlformats.org/drawingml/2006/main" xmlns:p="http://schemas.openxmlformats.org/presentationml/2006/main" xmlns:r="http://schemas.openxmlformats.org/officeDocument/2006/relationships">
+  <p:cSld>
+    <p:spTree>
+      <p:nvGrpSpPr>
+        <p:cNvPr id="1" name=""/>
+        <p:cNvGrpSpPr/>
+        <p:nvPr/>
+      </p:nvGrpSpPr>
+      <p:grpSpPr>
+        <a:xfrm>
+          <a:off x="0" y="0"/>
+          <a:ext cx="0" cy="0"/>
+          <a:chOff x="0" y="0"/>
+          <a:chExt cx="0" cy="0"/>
+        </a:xfrm>
+      </p:grpSpPr>
+      <p:sp>
+        <p:nvSpPr>
+          <p:cNvPr id="2" name="Slide Image Placeholder 1"/>
+          <p:cNvSpPr>
+            <a:spLocks noGrp="1"/>
+          </p:cNvSpPr>
+          <p:nvPr>
+            <p:ph type="sldImg" idx="2"/>
+          </p:nvPr>
+        </p:nvSpPr>
+        <p:spPr/>
+      </p:sp>
+      <p:sp>
+        <p:nvSpPr>
+          <p:cNvPr id="3" name="Notes Placeholder 2"/>
+          <p:cNvSpPr>
+            <a:spLocks noGrp="1"/>
+          </p:cNvSpPr>
+          <p:nvPr>
+            <p:ph type="body" idx="3" sz="quarter"/>
+          </p:nvPr>
+        </p:nvSpPr>
+        <p:spPr/>
+        <p:txBody>
+          <a:bodyPr/>
+          <a:lstStyle/>
+          <a:p>
+            <a:r>
+              <a:t>Primer — how to actually author a template: apply the syntax to build a related resource set.</a:t>
+            </a:r>
+          </a:p>
+          <a:p>
+            <a:r>
+              <a:t>• First bullet: apply the template syntax (from Topic 6) to CREATE a template that provisions a SET of</a:t>
+            </a:r>
+          </a:p>
+          <a:p>
+            <a:r>
+              <a:t>RELATED resources — not one resource, a related set that works together.</a:t>
+            </a:r>
+          </a:p>
+          <a:p>
+            <a:r>
+              <a:t>• Second bullet: start from the OUTCOME — what resources, what depends on what, what inputs and outputs.</a:t>
+            </a:r>
+          </a:p>
+          <a:p>
+            <a:r>
+              <a:t>Design the template before you type it.</a:t>
+            </a:r>
+          </a:p>
+          <a:p>
+            <a:r>
+              <a:t>• Third bullet: build INCREMENTALLY — a few resources, deploy, confirm, add more. Don't write 200 lines</a:t>
+            </a:r>
+          </a:p>
+          <a:p>
+            <a:r>
+              <a:t>then deploy and drown in errors.</a:t>
+            </a:r>
+          </a:p>
+          <a:p>
+            <a:r>
+              <a:t>Misconception to pre-empt: "write the whole template, then deploy once at the end." No — incremental</a:t>
+            </a:r>
+          </a:p>
+          <a:p>
+            <a:r>
+              <a:t>authoring (deploy early, deploy often) catches each error in isolation; a big-bang deploy buries the</a:t>
+            </a:r>
+          </a:p>
+          <a:p>
+            <a:r>
+              <a:t>first failure under many.</a:t>
+            </a:r>
+          </a:p>
+          <a:p>
+            <a:r>
+              <a:t>Question to pose: "Before you type a single resource, what three things should you have decided?" (what</a:t>
+            </a:r>
+          </a:p>
+          <a:p>
+            <a:r>
+              <a:t>resources, their dependencies, and the inputs/outputs).</a:t>
+            </a:r>
+          </a:p>
+          <a:p>
+            <a:r>
+              <a:t>UoC/AT2 tie: ICTCLD505 PC 3.1 (template syntax) + PC 3.2 (create &amp; deploy a related resource set) + PE 2</a:t>
+            </a:r>
+          </a:p>
+          <a:p>
+            <a:r>
+              <a:t>(at least one own template) → AT2 §4.3 (D3).</a:t>
+            </a:r>
+          </a:p>
+        </p:txBody>
+      </p:sp>
+      <p:sp>
+        <p:nvSpPr>
+          <p:cNvPr id="4" name="Slide Number Placeholder 3"/>
+          <p:cNvSpPr>
+            <a:spLocks noGrp="1"/>
+          </p:cNvSpPr>
+          <p:nvPr>
+            <p:ph type="sldNum" idx="5" sz="quarter"/>
+          </p:nvPr>
+        </p:nvSpPr>
+        <p:spPr/>
+      </p:sp>
+    </p:spTree>
+  </p:cSld>
+  <p:clrMapOvr>
+    <a:masterClrMapping/>
+  </p:clrMapOvr>
+</p:notes>
+</file>
+
+<file path=ppt/notesSlides/notesSlide3.xml><?xml version="1.0" encoding="utf-8"?>
+<p:notes xmlns:a="http://schemas.openxmlformats.org/drawingml/2006/main" xmlns:p="http://schemas.openxmlformats.org/presentationml/2006/main" xmlns:r="http://schemas.openxmlformats.org/officeDocument/2006/relationships">
+  <p:cSld>
+    <p:spTree>
+      <p:nvGrpSpPr>
+        <p:cNvPr id="1" name=""/>
+        <p:cNvGrpSpPr/>
+        <p:nvPr/>
+      </p:nvGrpSpPr>
+      <p:grpSpPr>
+        <a:xfrm>
+          <a:off x="0" y="0"/>
+          <a:ext cx="0" cy="0"/>
+          <a:chOff x="0" y="0"/>
+          <a:chExt cx="0" cy="0"/>
+        </a:xfrm>
+      </p:grpSpPr>
+      <p:sp>
+        <p:nvSpPr>
+          <p:cNvPr id="2" name="Slide Image Placeholder 1"/>
+          <p:cNvSpPr>
+            <a:spLocks noGrp="1"/>
+          </p:cNvSpPr>
+          <p:nvPr>
+            <p:ph type="sldImg" idx="2"/>
+          </p:nvPr>
+        </p:nvSpPr>
+        <p:spPr/>
+      </p:sp>
+      <p:sp>
+        <p:nvSpPr>
+          <p:cNvPr id="3" name="Notes Placeholder 2"/>
+          <p:cNvSpPr>
+            <a:spLocks noGrp="1"/>
+          </p:cNvSpPr>
+          <p:nvPr>
+            <p:ph type="body" idx="3" sz="quarter"/>
+          </p:nvPr>
+        </p:nvSpPr>
+        <p:spPr/>
+        <p:txBody>
+          <a:bodyPr/>
+          <a:lstStyle/>
+          <a:p>
+            <a:r>
+              <a:t>Bespoke — the industry-standard practices that make an authored template professional. KE 9. Teach as a</a:t>
+            </a:r>
+          </a:p>
+          <a:p>
+            <a:r>
+              <a:t>checklist they'll be judged against.</a:t>
+            </a:r>
+          </a:p>
+          <a:p>
+            <a:r>
+              <a:t>• First bullet: PARAMETERS over hard-coded values; LEAST-PRIVILEGE on any role; TAG every resource.</a:t>
+            </a:r>
+          </a:p>
+          <a:p>
+            <a:r>
+              <a:t>Three habits that separate a professional template from a throwaway.</a:t>
+            </a:r>
+          </a:p>
+          <a:p>
+            <a:r>
+              <a:t>• Second bullet: OUTPUTS expose what other stacks/services need — the integration seam (KE 9). Outputs</a:t>
+            </a:r>
+          </a:p>
+          <a:p>
+            <a:r>
+              <a:t>are how your template plugs into the rest of the system.</a:t>
+            </a:r>
+          </a:p>
+          <a:p>
+            <a:r>
+              <a:t>• Third bullet (the why): standard practice is what makes a template safe to REUSE and to HAND OVER.</a:t>
+            </a:r>
+          </a:p>
+          <a:p>
+            <a:r>
+              <a:t>You're building something someone else will run — write it so they can.</a:t>
+            </a:r>
+          </a:p>
+          <a:p>
+            <a:r>
+              <a:t>Misconception to pre-empt: "hard-coding values is fine, it works." It runs, but it can't be reused or</a:t>
+            </a:r>
+          </a:p>
+          <a:p>
+            <a:r>
+              <a:t>safely handed over — the same template can't target another environment, and a broad role is a security</a:t>
+            </a:r>
+          </a:p>
+          <a:p>
+            <a:r>
+              <a:t>finding. "It works" isn't the bar; "safe to reuse and hand over" is.</a:t>
+            </a:r>
+          </a:p>
+          <a:p>
+            <a:r>
+              <a:t>Question to pose: "Your template hard-codes the Region and grants AdministratorAccess to a role — name</a:t>
+            </a:r>
+          </a:p>
+          <a:p>
+            <a:r>
+              <a:t>the two industry practices you've just broken." (parameterisation; least privilege).</a:t>
+            </a:r>
+          </a:p>
+          <a:p>
+            <a:r>
+              <a:t>UoC/AT2 tie: ICTCLD505 KE 9 (industry-standard practices to define IaC) + PC 3.2 → AT2 §4.3 + §5 config</a:t>
+            </a:r>
+          </a:p>
+          <a:p>
+            <a:r>
+              <a:t>decisions (D3/D8).</a:t>
+            </a:r>
+          </a:p>
+        </p:txBody>
+      </p:sp>
+      <p:sp>
+        <p:nvSpPr>
+          <p:cNvPr id="4" name="Slide Number Placeholder 3"/>
+          <p:cNvSpPr>
+            <a:spLocks noGrp="1"/>
+          </p:cNvSpPr>
+          <p:nvPr>
+            <p:ph type="sldNum" idx="5" sz="quarter"/>
+          </p:nvPr>
+        </p:nvSpPr>
+        <p:spPr/>
+      </p:sp>
+    </p:spTree>
+  </p:cSld>
+  <p:clrMapOvr>
+    <a:masterClrMapping/>
+  </p:clrMapOvr>
+</p:notes>
+</file>
+
+<file path=ppt/notesSlides/notesSlide4.xml><?xml version="1.0" encoding="utf-8"?>
+<p:notes xmlns:a="http://schemas.openxmlformats.org/drawingml/2006/main" xmlns:p="http://schemas.openxmlformats.org/presentationml/2006/main" xmlns:r="http://schemas.openxmlformats.org/officeDocument/2006/relationships">
+  <p:cSld>
+    <p:spTree>
+      <p:nvGrpSpPr>
+        <p:cNvPr id="1" name=""/>
+        <p:cNvGrpSpPr/>
+        <p:nvPr/>
+      </p:nvGrpSpPr>
+      <p:grpSpPr>
+        <a:xfrm>
+          <a:off x="0" y="0"/>
+          <a:ext cx="0" cy="0"/>
+          <a:chOff x="0" y="0"/>
+          <a:chExt cx="0" cy="0"/>
+        </a:xfrm>
+      </p:grpSpPr>
+      <p:sp>
+        <p:nvSpPr>
+          <p:cNvPr id="2" name="Slide Image Placeholder 1"/>
+          <p:cNvSpPr>
+            <a:spLocks noGrp="1"/>
+          </p:cNvSpPr>
+          <p:nvPr>
+            <p:ph type="sldImg" idx="2"/>
+          </p:nvPr>
+        </p:nvSpPr>
+        <p:spPr/>
+      </p:sp>
+      <p:sp>
+        <p:nvSpPr>
+          <p:cNvPr id="3" name="Notes Placeholder 2"/>
+          <p:cNvSpPr>
+            <a:spLocks noGrp="1"/>
+          </p:cNvSpPr>
+          <p:nvPr>
+            <p:ph type="body" idx="3" sz="quarter"/>
+          </p:nvPr>
+        </p:nvSpPr>
+        <p:spPr/>
+        <p:txBody>
+          <a:bodyPr/>
+          <a:lstStyle/>
+          <a:p>
+            <a:r>
+              <a:t>LIVE DEMONSTRATION (educator-led — screen it live, or your own screen capture; CL2 has no recorded-demos</a:t>
+            </a:r>
+          </a:p>
+          <a:p>
+            <a:r>
+              <a:t>catalogue). Author a small template FROM SCRATCH against the lab-pack, then students replicate on the</a:t>
+            </a:r>
+          </a:p>
+          <a:p>
+            <a:r>
+              <a:t>next slide.</a:t>
+            </a:r>
+          </a:p>
+          <a:p/>
+          <a:p>
+            <a:r>
+              <a:t>WHAT TO DEMONSTRATE (in the Learner Lab, us-east-1 —</a:t>
+            </a:r>
+          </a:p>
+          <a:p>
+            <a:r>
+              <a:t>[scenario: ap-southeast-2 (Sydney) | deploy: us-east-1]):</a:t>
+            </a:r>
+          </a:p>
+          <a:p>
+            <a:r>
+              <a:t>1. Start from the outcome — state the small related resource set you'll create and the dependency</a:t>
+            </a:r>
+          </a:p>
+          <a:p>
+            <a:r>
+              <a:t>between them.</a:t>
+            </a:r>
+          </a:p>
+          <a:p>
+            <a:r>
+              <a:t>2. Author the template incrementally — write a couple of resources, applying the industry practices</a:t>
+            </a:r>
+          </a:p>
+          <a:p>
+            <a:r>
+              <a:t>(a parameter instead of a hard-coded value, a tag, least privilege on any role).</a:t>
+            </a:r>
+          </a:p>
+          <a:p>
+            <a:r>
+              <a:t>3. Deploy it; watch it reach CREATE_COMPLETE.</a:t>
+            </a:r>
+          </a:p>
+          <a:p>
+            <a:r>
+              <a:t>4. Confirm the resources exist in the console/CLI.</a:t>
+            </a:r>
+          </a:p>
+          <a:p/>
+          <a:p>
+            <a:r>
+              <a:t>WHAT TO EMPHASISE:</a:t>
+            </a:r>
+          </a:p>
+          <a:p>
+            <a:r>
+              <a:t>• Design BEFORE typing — say the resources and dependencies out loud first.</a:t>
+            </a:r>
+          </a:p>
+          <a:p>
+            <a:r>
+              <a:t>• Build incrementally — deploy the small set, confirm, and note how you'd add more; don't write it all</a:t>
+            </a:r>
+          </a:p>
+          <a:p>
+            <a:r>
+              <a:t>at once.</a:t>
+            </a:r>
+          </a:p>
+          <a:p>
+            <a:r>
+              <a:t>• Point at each industry practice AS you write it (parameter, tag, least-privilege role) — model the</a:t>
+            </a:r>
+          </a:p>
+          <a:p>
+            <a:r>
+              <a:t>habits from the previous slide.</a:t>
+            </a:r>
+          </a:p>
+          <a:p>
+            <a:r>
+              <a:t>• Set Region us-east-1 first and name the substitution.</a:t>
+            </a:r>
+          </a:p>
+          <a:p/>
+          <a:p>
+            <a:r>
+              <a:t>PREP: clean Learner Lab in us-east-1, a small resource set in mind (e.g. a couple of related resources</a:t>
+            </a:r>
+          </a:p>
+          <a:p>
+            <a:r>
+              <a:t>with one dependency), editor ready. ~8–10 min to screen + narrate before the activity.</a:t>
+            </a:r>
+          </a:p>
+        </p:txBody>
+      </p:sp>
+      <p:sp>
+        <p:nvSpPr>
+          <p:cNvPr id="4" name="Slide Number Placeholder 3"/>
+          <p:cNvSpPr>
+            <a:spLocks noGrp="1"/>
+          </p:cNvSpPr>
+          <p:nvPr>
+            <p:ph type="sldNum" idx="5" sz="quarter"/>
+          </p:nvPr>
+        </p:nvSpPr>
+        <p:spPr/>
+      </p:sp>
+    </p:spTree>
+  </p:cSld>
+  <p:clrMapOvr>
+    <a:masterClrMapping/>
+  </p:clrMapOvr>
+</p:notes>
+</file>
+
+<file path=ppt/notesSlides/notesSlide5.xml><?xml version="1.0" encoding="utf-8"?>
+<p:notes xmlns:a="http://schemas.openxmlformats.org/drawingml/2006/main" xmlns:p="http://schemas.openxmlformats.org/presentationml/2006/main" xmlns:r="http://schemas.openxmlformats.org/officeDocument/2006/relationships">
+  <p:cSld>
+    <p:spTree>
+      <p:nvGrpSpPr>
+        <p:cNvPr id="1" name=""/>
+        <p:cNvGrpSpPr/>
+        <p:nvPr/>
+      </p:nvGrpSpPr>
+      <p:grpSpPr>
+        <a:xfrm>
+          <a:off x="0" y="0"/>
+          <a:ext cx="0" cy="0"/>
+          <a:chOff x="0" y="0"/>
+          <a:chExt cx="0" cy="0"/>
+        </a:xfrm>
+      </p:grpSpPr>
+      <p:sp>
+        <p:nvSpPr>
+          <p:cNvPr id="2" name="Slide Image Placeholder 1"/>
+          <p:cNvSpPr>
+            <a:spLocks noGrp="1"/>
+          </p:cNvSpPr>
+          <p:nvPr>
+            <p:ph type="sldImg" idx="2"/>
+          </p:nvPr>
+        </p:nvSpPr>
+        <p:spPr/>
+      </p:sp>
+      <p:sp>
+        <p:nvSpPr>
+          <p:cNvPr id="3" name="Notes Placeholder 2"/>
+          <p:cNvSpPr>
+            <a:spLocks noGrp="1"/>
+          </p:cNvSpPr>
+          <p:nvPr>
+            <p:ph type="body" idx="3" sz="quarter"/>
+          </p:nvPr>
+        </p:nvSpPr>
+        <p:spPr/>
+        <p:txBody>
+          <a:bodyPr/>
+          <a:lstStyle/>
+          <a:p>
+            <a:r>
+              <a:t>Facilitation — the C1 practice; students author their OWN template on the practice scenario. First</a:t>
+            </a:r>
+          </a:p>
+          <a:p>
+            <a:r>
+              <a:t>from-scratch authoring — expect it to be slower than operating.</a:t>
+            </a:r>
+          </a:p>
+          <a:p>
+            <a:r>
+              <a:t>Tell students, in these words: "On the practice scenario, author a template that provisions a related</a:t>
+            </a:r>
+          </a:p>
+          <a:p>
+            <a:r>
+              <a:t>resource set to a business need. Deploy it to us-east-1 and confirm it."</a:t>
+            </a:r>
+          </a:p>
+          <a:p>
+            <a:r>
+              <a:t>Steps (put on the board):</a:t>
+            </a:r>
+          </a:p>
+          <a:p>
+            <a:r>
+              <a:t>1. Decide the outcome first — what related resources, what depends on what, inputs and outputs.</a:t>
+            </a:r>
+          </a:p>
+          <a:p>
+            <a:r>
+              <a:t>2. Author incrementally — a couple of resources, apply the industry practices (parameters, tags,</a:t>
+            </a:r>
+          </a:p>
+          <a:p>
+            <a:r>
+              <a:t>least-privilege), deploy, confirm, add more.</a:t>
+            </a:r>
+          </a:p>
+          <a:p>
+            <a:r>
+              <a:t>3. Deploy in us-east-1 — [scenario: ap-southeast-2 (Sydney) | deploy: us-east-1] — to CREATE_COMPLETE;</a:t>
+            </a:r>
+          </a:p>
+          <a:p>
+            <a:r>
+              <a:t>confirm the resources.</a:t>
+            </a:r>
+          </a:p>
+          <a:p>
+            <a:r>
+              <a:t>Must produce: their own working template that deploys a related resource set to CREATE_COMPLETE,</a:t>
+            </a:r>
+          </a:p>
+          <a:p>
+            <a:r>
+              <a:t>confirmed.</a:t>
+            </a:r>
+          </a:p>
+          <a:p>
+            <a:r>
+              <a:t>Timing: ~30 min (authoring is slower). Where they get stuck: syntax errors (a bad !Ref, indentation) and</a:t>
+            </a:r>
+          </a:p>
+          <a:p>
+            <a:r>
+              <a:t>trying to write it all before deploying — push them to deploy a tiny version early and grow it.</a:t>
+            </a:r>
+          </a:p>
+          <a:p>
+            <a:r>
+              <a:t>Share-back prompt: "What was your first CREATE_FAILED, and what fixed it?" (normalises debugging your own</a:t>
+            </a:r>
+          </a:p>
+          <a:p>
+            <a:r>
+              <a:t>template).</a:t>
+            </a:r>
+          </a:p>
+          <a:p>
+            <a:r>
+              <a:t>No-leakage note: practice scenario — AT2 §4.3 has students author their OWN microservice template on a</a:t>
+            </a:r>
+          </a:p>
+          <a:p>
+            <a:r>
+              <a:t>different case (comparable, not identical); keep them on the practice need here.</a:t>
+            </a:r>
+          </a:p>
+        </p:txBody>
+      </p:sp>
+      <p:sp>
+        <p:nvSpPr>
+          <p:cNvPr id="4" name="Slide Number Placeholder 3"/>
+          <p:cNvSpPr>
+            <a:spLocks noGrp="1"/>
+          </p:cNvSpPr>
+          <p:nvPr>
+            <p:ph type="sldNum" idx="5" sz="quarter"/>
+          </p:nvPr>
+        </p:nvSpPr>
+        <p:spPr/>
+      </p:sp>
+    </p:spTree>
+  </p:cSld>
+  <p:clrMapOvr>
+    <a:masterClrMapping/>
+  </p:clrMapOvr>
+</p:notes>
+</file>
+
+<file path=ppt/notesSlides/notesSlide6.xml><?xml version="1.0" encoding="utf-8"?>
+<p:notes xmlns:a="http://schemas.openxmlformats.org/drawingml/2006/main" xmlns:p="http://schemas.openxmlformats.org/presentationml/2006/main" xmlns:r="http://schemas.openxmlformats.org/officeDocument/2006/relationships">
+  <p:cSld>
+    <p:spTree>
+      <p:nvGrpSpPr>
+        <p:cNvPr id="1" name=""/>
+        <p:cNvGrpSpPr/>
+        <p:nvPr/>
+      </p:nvGrpSpPr>
+      <p:grpSpPr>
+        <a:xfrm>
+          <a:off x="0" y="0"/>
+          <a:ext cx="0" cy="0"/>
+          <a:chOff x="0" y="0"/>
+          <a:chExt cx="0" cy="0"/>
+        </a:xfrm>
+      </p:grpSpPr>
+      <p:sp>
+        <p:nvSpPr>
+          <p:cNvPr id="2" name="Slide Image Placeholder 1"/>
+          <p:cNvSpPr>
+            <a:spLocks noGrp="1"/>
+          </p:cNvSpPr>
+          <p:nvPr>
+            <p:ph type="sldImg" idx="2"/>
+          </p:nvPr>
+        </p:nvSpPr>
+        <p:spPr/>
+      </p:sp>
+      <p:sp>
+        <p:nvSpPr>
+          <p:cNvPr id="3" name="Notes Placeholder 2"/>
+          <p:cNvSpPr>
+            <a:spLocks noGrp="1"/>
+          </p:cNvSpPr>
+          <p:nvPr>
+            <p:ph type="body" idx="3" sz="quarter"/>
+          </p:nvPr>
+        </p:nvSpPr>
+        <p:spPr/>
+        <p:txBody>
+          <a:bodyPr/>
+          <a:lstStyle/>
+          <a:p>
+            <a:r>
+              <a:t>Primer — parameterisation as the code-reuse outcome. This is the "aha" of IaC: one template, many</a:t>
+            </a:r>
+          </a:p>
+          <a:p>
+            <a:r>
+              <a:t>configurations.</a:t>
+            </a:r>
+          </a:p>
+          <a:p>
+            <a:r>
+              <a:t>• First bullet: parameterise the template so the SAME body deploys to different configurations WITHOUT</a:t>
+            </a:r>
+          </a:p>
+          <a:p>
+            <a:r>
+              <a:t>editing it (KE 8). The template stays fixed; the values change at deploy time.</a:t>
+            </a:r>
+          </a:p>
+          <a:p>
+            <a:r>
+              <a:t>• Second bullet: the things you pass IN, not bake in — Region, sizes, names, environment. Anything that</a:t>
+            </a:r>
+          </a:p>
+          <a:p>
+            <a:r>
+              <a:t>varies between deployments is a parameter.</a:t>
+            </a:r>
+          </a:p>
+          <a:p>
+            <a:r>
+              <a:t>• Third bullet (the point): parameterisation IS the code-reuse outcome — write once, deploy many. This is</a:t>
+            </a:r>
+          </a:p>
+          <a:p>
+            <a:r>
+              <a:t>why parameters matter, not just how.</a:t>
+            </a:r>
+          </a:p>
+          <a:p>
+            <a:r>
+              <a:t>Misconception to pre-empt: "to deploy to a different environment I copy the template and edit it." No —</a:t>
+            </a:r>
+          </a:p>
+          <a:p>
+            <a:r>
+              <a:t>that's two templates to maintain and they drift apart. One parameterised template, different values in.</a:t>
+            </a:r>
+          </a:p>
+          <a:p>
+            <a:r>
+              <a:t>Question to pose: "You need dev, test and prod versions of the same infrastructure — do you write three</a:t>
+            </a:r>
+          </a:p>
+          <a:p>
+            <a:r>
+              <a:t>templates?" (No — one template, three sets of parameter values).</a:t>
+            </a:r>
+          </a:p>
+          <a:p>
+            <a:r>
+              <a:t>UoC/AT2 tie: ICTCLD505 PC 3.5 (parameterise &amp; deploy to reuse) + KE 8 (parameterisation for config &amp;</a:t>
+            </a:r>
+          </a:p>
+          <a:p>
+            <a:r>
+              <a:t>code reuse) → AT2 §4.3 + §5 (D3/D8).</a:t>
+            </a:r>
+          </a:p>
+        </p:txBody>
+      </p:sp>
+      <p:sp>
+        <p:nvSpPr>
+          <p:cNvPr id="4" name="Slide Number Placeholder 3"/>
+          <p:cNvSpPr>
+            <a:spLocks noGrp="1"/>
+          </p:cNvSpPr>
+          <p:nvPr>
+            <p:ph type="sldNum" idx="5" sz="quarter"/>
+          </p:nvPr>
+        </p:nvSpPr>
+        <p:spPr/>
+      </p:sp>
+    </p:spTree>
+  </p:cSld>
+  <p:clrMapOvr>
+    <a:masterClrMapping/>
+  </p:clrMapOvr>
+</p:notes>
+</file>
+
+<file path=ppt/notesSlides/notesSlide7.xml><?xml version="1.0" encoding="utf-8"?>
+<p:notes xmlns:a="http://schemas.openxmlformats.org/drawingml/2006/main" xmlns:p="http://schemas.openxmlformats.org/presentationml/2006/main" xmlns:r="http://schemas.openxmlformats.org/officeDocument/2006/relationships">
+  <p:cSld>
+    <p:spTree>
+      <p:nvGrpSpPr>
+        <p:cNvPr id="1" name=""/>
+        <p:cNvGrpSpPr/>
+        <p:nvPr/>
+      </p:nvGrpSpPr>
+      <p:grpSpPr>
+        <a:xfrm>
+          <a:off x="0" y="0"/>
+          <a:ext cx="0" cy="0"/>
+          <a:chOff x="0" y="0"/>
+          <a:chExt cx="0" cy="0"/>
+        </a:xfrm>
+      </p:grpSpPr>
+      <p:sp>
+        <p:nvSpPr>
+          <p:cNvPr id="2" name="Slide Image Placeholder 1"/>
+          <p:cNvSpPr>
+            <a:spLocks noGrp="1"/>
+          </p:cNvSpPr>
+          <p:nvPr>
+            <p:ph type="sldImg" idx="2"/>
+          </p:nvPr>
+        </p:nvSpPr>
+        <p:spPr/>
+      </p:sp>
+      <p:sp>
+        <p:nvSpPr>
+          <p:cNvPr id="3" name="Notes Placeholder 2"/>
+          <p:cNvSpPr>
+            <a:spLocks noGrp="1"/>
+          </p:cNvSpPr>
+          <p:nvPr>
+            <p:ph type="body" idx="3" sz="quarter"/>
+          </p:nvPr>
+        </p:nvSpPr>
+        <p:spPr/>
+        <p:txBody>
+          <a:bodyPr/>
+          <a:lstStyle/>
+          <a:p>
+            <a:r>
+              <a:t>Bespoke — updating an authored template safely and confirming it, and the Region-as-parameter payoff.</a:t>
+            </a:r>
+          </a:p>
+          <a:p>
+            <a:r>
+              <a:t>• First bullet: UPDATE and redeploy to modify AND add resources — via a CHANGE SET (the same</a:t>
+            </a:r>
+          </a:p>
+          <a:p>
+            <a:r>
+              <a:t>review-the-diff discipline from Topic 6, now on your own template).</a:t>
+            </a:r>
+          </a:p>
+          <a:p>
+            <a:r>
+              <a:t>• Second bullet: CONFIRM the deployment via console or CLI after each change — deploy → confirm, every</a:t>
+            </a:r>
+          </a:p>
+          <a:p>
+            <a:r>
+              <a:t>time.</a:t>
+            </a:r>
+          </a:p>
+          <a:p>
+            <a:r>
+              <a:t>• Third bullet (the neat payoff): Region is itself a PARAMETER — the same template targets us-east-1 in</a:t>
+            </a:r>
+          </a:p>
+          <a:p>
+            <a:r>
+              <a:t>the lab OR the design Region in production. This is exactly the [scenario | deploy] substitution</a:t>
+            </a:r>
+          </a:p>
+          <a:p>
+            <a:r>
+              <a:t>expressed as a parameter.</a:t>
+            </a:r>
+          </a:p>
+          <a:p>
+            <a:r>
+              <a:t>Misconception to pre-empt: "to add a resource I tear down and rebuild the stack." No — you update via a</a:t>
+            </a:r>
+          </a:p>
+          <a:p>
+            <a:r>
+              <a:t>change set; the platform adds/modifies in place and shows you the diff first. Rebuilding loses state and</a:t>
+            </a:r>
+          </a:p>
+          <a:p>
+            <a:r>
+              <a:t>data.</a:t>
+            </a:r>
+          </a:p>
+          <a:p>
+            <a:r>
+              <a:t>Question to pose: "Why is 'Region as a parameter' the cleanest way to handle our scenario/deploy</a:t>
+            </a:r>
+          </a:p>
+          <a:p>
+            <a:r>
+              <a:t>substitution?" (one template, deploy to us-east-1 in the lab or the design Region in prod — no editing).</a:t>
+            </a:r>
+          </a:p>
+          <a:p>
+            <a:r>
+              <a:t>UoC/AT2 tie: ICTCLD505 PC 3.3 (update &amp; redeploy) + PC 3.4 (confirm via console/CLI) + PE 2 → AT2 §4.3</a:t>
+            </a:r>
+          </a:p>
+          <a:p>
+            <a:r>
+              <a:t>(D3).</a:t>
+            </a:r>
+          </a:p>
+        </p:txBody>
+      </p:sp>
+      <p:sp>
+        <p:nvSpPr>
+          <p:cNvPr id="4" name="Slide Number Placeholder 3"/>
+          <p:cNvSpPr>
+            <a:spLocks noGrp="1"/>
+          </p:cNvSpPr>
+          <p:nvPr>
+            <p:ph type="sldNum" idx="5" sz="quarter"/>
+          </p:nvPr>
+        </p:nvSpPr>
+        <p:spPr/>
+      </p:sp>
+    </p:spTree>
+  </p:cSld>
+  <p:clrMapOvr>
+    <a:masterClrMapping/>
+  </p:clrMapOvr>
+</p:notes>
+</file>
+
+<file path=ppt/notesSlides/notesSlide8.xml><?xml version="1.0" encoding="utf-8"?>
+<p:notes xmlns:a="http://schemas.openxmlformats.org/drawingml/2006/main" xmlns:p="http://schemas.openxmlformats.org/presentationml/2006/main" xmlns:r="http://schemas.openxmlformats.org/officeDocument/2006/relationships">
+  <p:cSld>
+    <p:spTree>
+      <p:nvGrpSpPr>
+        <p:cNvPr id="1" name=""/>
+        <p:cNvGrpSpPr/>
+        <p:nvPr/>
+      </p:nvGrpSpPr>
+      <p:grpSpPr>
+        <a:xfrm>
+          <a:off x="0" y="0"/>
+          <a:ext cx="0" cy="0"/>
+          <a:chOff x="0" y="0"/>
+          <a:chExt cx="0" cy="0"/>
+        </a:xfrm>
+      </p:grpSpPr>
+      <p:sp>
+        <p:nvSpPr>
+          <p:cNvPr id="2" name="Slide Image Placeholder 1"/>
+          <p:cNvSpPr>
+            <a:spLocks noGrp="1"/>
+          </p:cNvSpPr>
+          <p:nvPr>
+            <p:ph type="sldImg" idx="2"/>
+          </p:nvPr>
+        </p:nvSpPr>
+        <p:spPr/>
+      </p:sp>
+      <p:sp>
+        <p:nvSpPr>
+          <p:cNvPr id="3" name="Notes Placeholder 2"/>
+          <p:cNvSpPr>
+            <a:spLocks noGrp="1"/>
+          </p:cNvSpPr>
+          <p:nvPr>
+            <p:ph type="body" idx="3" sz="quarter"/>
+          </p:nvPr>
+        </p:nvSpPr>
+        <p:spPr/>
+        <p:txBody>
+          <a:bodyPr/>
+          <a:lstStyle/>
+          <a:p>
+            <a:r>
+              <a:t>Facilitation — the C2 practice; students parameterise their own template and prove reuse by redeploying</a:t>
+            </a:r>
+          </a:p>
+          <a:p>
+            <a:r>
+              <a:t>with different values.</a:t>
+            </a:r>
+          </a:p>
+          <a:p>
+            <a:r>
+              <a:t>Tell students, in these words: "On the practice scenario, parameterise your template and redeploy it</a:t>
+            </a:r>
+          </a:p>
+          <a:p>
+            <a:r>
+              <a:t>with different values. Confirm the reconfigured resources."</a:t>
+            </a:r>
+          </a:p>
+          <a:p>
+            <a:r>
+              <a:t>Steps (put on the board):</a:t>
+            </a:r>
+          </a:p>
+          <a:p>
+            <a:r>
+              <a:t>1. Pick a hard-coded value in your template (name, size, or Region) and make it a Parameter.</a:t>
+            </a:r>
+          </a:p>
+          <a:p>
+            <a:r>
+              <a:t>2. Redeploy with one set of values via a change set; confirm.</a:t>
+            </a:r>
+          </a:p>
+          <a:p>
+            <a:r>
+              <a:t>3. Redeploy AGAIN with different values; confirm the SAME template produced a different configuration.</a:t>
+            </a:r>
+          </a:p>
+          <a:p>
+            <a:r>
+              <a:t>Must produce: one parameterised template deployed twice with different values, each confirmed — reuse</a:t>
+            </a:r>
+          </a:p>
+          <a:p>
+            <a:r>
+              <a:t>demonstrated.</a:t>
+            </a:r>
+          </a:p>
+          <a:p>
+            <a:r>
+              <a:t>Timing: ~25 min. Where they get stuck: they edit the template body instead of just the parameter values</a:t>
+            </a:r>
+          </a:p>
+          <a:p>
+            <a:r>
+              <a:t>(defeats the point) — insist the body stays fixed between the two deploys; and parameter type/default</a:t>
+            </a:r>
+          </a:p>
+          <a:p>
+            <a:r>
+              <a:t>errors.</a:t>
+            </a:r>
+          </a:p>
+          <a:p>
+            <a:r>
+              <a:t>Share-back prompt: "Prove your template is reusable — what changed between your two deploys, and what</a:t>
+            </a:r>
+          </a:p>
+          <a:p>
+            <a:r>
+              <a:t>stayed the same?" (values changed; body fixed).</a:t>
+            </a:r>
+          </a:p>
+          <a:p>
+            <a:r>
+              <a:t>No-leakage note: practice scenario — AT2 §4.3 assesses parameterisation on the student's own</a:t>
+            </a:r>
+          </a:p>
+          <a:p>
+            <a:r>
+              <a:t>microservice template (comparable, not identical).</a:t>
+            </a:r>
+          </a:p>
+        </p:txBody>
+      </p:sp>
+      <p:sp>
+        <p:nvSpPr>
+          <p:cNvPr id="4" name="Slide Number Placeholder 3"/>
+          <p:cNvSpPr>
+            <a:spLocks noGrp="1"/>
+          </p:cNvSpPr>
+          <p:nvPr>
+            <p:ph type="sldNum" idx="5" sz="quarter"/>
+          </p:nvPr>
+        </p:nvSpPr>
+        <p:spPr/>
+      </p:sp>
+    </p:spTree>
+  </p:cSld>
+  <p:clrMapOvr>
+    <a:masterClrMapping/>
+  </p:clrMapOvr>
+</p:notes>
+</file>
+
+<file path=ppt/notesSlides/notesSlide9.xml><?xml version="1.0" encoding="utf-8"?>
+<p:notes xmlns:a="http://schemas.openxmlformats.org/drawingml/2006/main" xmlns:p="http://schemas.openxmlformats.org/presentationml/2006/main" xmlns:r="http://schemas.openxmlformats.org/officeDocument/2006/relationships">
+  <p:cSld>
+    <p:spTree>
+      <p:nvGrpSpPr>
+        <p:cNvPr id="1" name=""/>
+        <p:cNvGrpSpPr/>
+        <p:nvPr/>
+      </p:nvGrpSpPr>
+      <p:grpSpPr>
+        <a:xfrm>
+          <a:off x="0" y="0"/>
+          <a:ext cx="0" cy="0"/>
+          <a:chOff x="0" y="0"/>
+          <a:chExt cx="0" cy="0"/>
+        </a:xfrm>
+      </p:grpSpPr>
+      <p:sp>
+        <p:nvSpPr>
+          <p:cNvPr id="2" name="Slide Image Placeholder 1"/>
+          <p:cNvSpPr>
+            <a:spLocks noGrp="1"/>
+          </p:cNvSpPr>
+          <p:nvPr>
+            <p:ph type="sldImg" idx="2"/>
+          </p:nvPr>
+        </p:nvSpPr>
+        <p:spPr/>
+      </p:sp>
+      <p:sp>
+        <p:nvSpPr>
+          <p:cNvPr id="3" name="Notes Placeholder 2"/>
+          <p:cNvSpPr>
+            <a:spLocks noGrp="1"/>
+          </p:cNvSpPr>
+          <p:nvPr>
+            <p:ph type="body" idx="3" sz="quarter"/>
+          </p:nvPr>
+        </p:nvSpPr>
+        <p:spPr/>
+        <p:txBody>
+          <a:bodyPr/>
+          <a:lstStyle/>
+          <a:p>
+            <a:r>
+              <a:t>Facilitation — the C2 practice; students parameterise their own template and prove reuse by redeploying</a:t>
+            </a:r>
+          </a:p>
+          <a:p>
+            <a:r>
+              <a:t>with different values.</a:t>
+            </a:r>
+          </a:p>
+          <a:p>
+            <a:r>
+              <a:t>Tell students, in these words: "On the practice scenario, parameterise your template and redeploy it</a:t>
+            </a:r>
+          </a:p>
+          <a:p>
+            <a:r>
+              <a:t>with different values. Confirm the reconfigured resources."</a:t>
+            </a:r>
+          </a:p>
+          <a:p>
+            <a:r>
+              <a:t>Steps (put on the board):</a:t>
+            </a:r>
+          </a:p>
+          <a:p>
+            <a:r>
+              <a:t>1. Pick a hard-coded value in your template (name, size, or Region) and make it a Parameter.</a:t>
+            </a:r>
+          </a:p>
+          <a:p>
+            <a:r>
+              <a:t>2. Redeploy with one set of values via a change set; confirm.</a:t>
+            </a:r>
+          </a:p>
+          <a:p>
+            <a:r>
+              <a:t>3. Redeploy AGAIN with different values; confirm the SAME template produced a different configuration.</a:t>
+            </a:r>
+          </a:p>
+          <a:p>
+            <a:r>
+              <a:t>Must produce: one parameterised template deployed twice with different values, each confirmed — reuse</a:t>
+            </a:r>
+          </a:p>
+          <a:p>
+            <a:r>
+              <a:t>demonstrated.</a:t>
+            </a:r>
+          </a:p>
+          <a:p>
+            <a:r>
+              <a:t>Timing: ~25 min. Where they get stuck: they edit the template body instead of just the parameter values</a:t>
+            </a:r>
+          </a:p>
+          <a:p>
+            <a:r>
+              <a:t>(defeats the point) — insist the body stays fixed between the two deploys; and parameter type/default</a:t>
+            </a:r>
+          </a:p>
+          <a:p>
+            <a:r>
+              <a:t>errors.</a:t>
+            </a:r>
+          </a:p>
+          <a:p>
+            <a:r>
+              <a:t>Share-back prompt: "Prove your template is reusable — what changed between your two deploys, and what</a:t>
+            </a:r>
+          </a:p>
+          <a:p>
+            <a:r>
+              <a:t>stayed the same?" (values changed; body fixed).</a:t>
+            </a:r>
+          </a:p>
+          <a:p>
+            <a:r>
+              <a:t>No-leakage note: practice scenario — AT2 §4.3 assesses parameterisation on the student's own</a:t>
+            </a:r>
+          </a:p>
+          <a:p>
+            <a:r>
+              <a:t>microservice template (comparable, not identical).</a:t>
+            </a:r>
+          </a:p>
+        </p:txBody>
+      </p:sp>
+      <p:sp>
+        <p:nvSpPr>
+          <p:cNvPr id="4" name="Slide Number Placeholder 3"/>
+          <p:cNvSpPr>
+            <a:spLocks noGrp="1"/>
+          </p:cNvSpPr>
+          <p:nvPr>
+            <p:ph type="sldNum" idx="5" sz="quarter"/>
+          </p:nvPr>
+        </p:nvSpPr>
+        <p:spPr/>
+      </p:sp>
+    </p:spTree>
+  </p:cSld>
+  <p:clrMapOvr>
+    <a:masterClrMapping/>
+  </p:clrMapOvr>
+</p:notes>
 </file>
 
 <file path=ppt/slideLayouts/slideLayout1.xml><?xml version="1.0" encoding="utf-8"?>
@@ -9632,4 +11580,324 @@
   </a:objectDefaults>
   <a:extraClrSchemeLst/>
 </a:theme>
+</file>
+
+<file path=ppt/theme/theme2.xml><?xml version="1.0" encoding="utf-8"?>
+<a:theme xmlns:a="http://schemas.openxmlformats.org/drawingml/2006/main" name="Office Theme">
+  <a:themeElements>
+    <a:clrScheme name="Office">
+      <a:dk1>
+        <a:sysClr val="windowText" lastClr="000000"/>
+      </a:dk1>
+      <a:lt1>
+        <a:sysClr val="window" lastClr="FFFFFF"/>
+      </a:lt1>
+      <a:dk2>
+        <a:srgbClr val="1F497D"/>
+      </a:dk2>
+      <a:lt2>
+        <a:srgbClr val="EEECE1"/>
+      </a:lt2>
+      <a:accent1>
+        <a:srgbClr val="4F81BD"/>
+      </a:accent1>
+      <a:accent2>
+        <a:srgbClr val="C0504D"/>
+      </a:accent2>
+      <a:accent3>
+        <a:srgbClr val="9BBB59"/>
+      </a:accent3>
+      <a:accent4>
+        <a:srgbClr val="8064A2"/>
+      </a:accent4>
+      <a:accent5>
+        <a:srgbClr val="4BACC6"/>
+      </a:accent5>
+      <a:accent6>
+        <a:srgbClr val="F79646"/>
+      </a:accent6>
+      <a:hlink>
+        <a:srgbClr val="0000FF"/>
+      </a:hlink>
+      <a:folHlink>
+        <a:srgbClr val="800080"/>
+      </a:folHlink>
+    </a:clrScheme>
+    <a:fontScheme name="Office">
+      <a:majorFont>
+        <a:latin typeface="Calibri"/>
+        <a:ea typeface=""/>
+        <a:cs typeface=""/>
+        <a:font script="Jpan" typeface="ＭＳ Ｐゴシック"/>
+        <a:font script="Hang" typeface="맑은 고딕"/>
+        <a:font script="Hans" typeface="宋体"/>
+        <a:font script="Hant" typeface="新細明體"/>
+        <a:font script="Arab" typeface="Times New Roman"/>
+        <a:font script="Hebr" typeface="Times New Roman"/>
+        <a:font script="Thai" typeface="Angsana New"/>
+        <a:font script="Ethi" typeface="Nyala"/>
+        <a:font script="Beng" typeface="Vrinda"/>
+        <a:font script="Gujr" typeface="Shruti"/>
+        <a:font script="Khmr" typeface="MoolBoran"/>
+        <a:font script="Knda" typeface="Tunga"/>
+        <a:font script="Guru" typeface="Raavi"/>
+        <a:font script="Cans" typeface="Euphemia"/>
+        <a:font script="Cher" typeface="Plantagenet Cherokee"/>
+        <a:font script="Yiii" typeface="Microsoft Yi Baiti"/>
+        <a:font script="Tibt" typeface="Microsoft Himalaya"/>
+        <a:font script="Thaa" typeface="MV Boli"/>
+        <a:font script="Deva" typeface="Mangal"/>
+        <a:font script="Telu" typeface="Gautami"/>
+        <a:font script="Taml" typeface="Latha"/>
+        <a:font script="Syrc" typeface="Estrangelo Edessa"/>
+        <a:font script="Orya" typeface="Kalinga"/>
+        <a:font script="Mlym" typeface="Kartika"/>
+        <a:font script="Laoo" typeface="DokChampa"/>
+        <a:font script="Sinh" typeface="Iskoola Pota"/>
+        <a:font script="Mong" typeface="Mongolian Baiti"/>
+        <a:font script="Viet" typeface="Times New Roman"/>
+        <a:font script="Uigh" typeface="Microsoft Uighur"/>
+        <a:font script="Geor" typeface="Sylfaen"/>
+      </a:majorFont>
+      <a:minorFont>
+        <a:latin typeface="Calibri"/>
+        <a:ea typeface=""/>
+        <a:cs typeface=""/>
+        <a:font script="Jpan" typeface="ＭＳ Ｐゴシック"/>
+        <a:font script="Hang" typeface="맑은 고딕"/>
+        <a:font script="Hans" typeface="宋体"/>
+        <a:font script="Hant" typeface="新細明體"/>
+        <a:font script="Arab" typeface="Arial"/>
+        <a:font script="Hebr" typeface="Arial"/>
+        <a:font script="Thai" typeface="Cordia New"/>
+        <a:font script="Ethi" typeface="Nyala"/>
+        <a:font script="Beng" typeface="Vrinda"/>
+        <a:font script="Gujr" typeface="Shruti"/>
+        <a:font script="Khmr" typeface="DaunPenh"/>
+        <a:font script="Knda" typeface="Tunga"/>
+        <a:font script="Guru" typeface="Raavi"/>
+        <a:font script="Cans" typeface="Euphemia"/>
+        <a:font script="Cher" typeface="Plantagenet Cherokee"/>
+        <a:font script="Yiii" typeface="Microsoft Yi Baiti"/>
+        <a:font script="Tibt" typeface="Microsoft Himalaya"/>
+        <a:font script="Thaa" typeface="MV Boli"/>
+        <a:font script="Deva" typeface="Mangal"/>
+        <a:font script="Telu" typeface="Gautami"/>
+        <a:font script="Taml" typeface="Latha"/>
+        <a:font script="Syrc" typeface="Estrangelo Edessa"/>
+        <a:font script="Orya" typeface="Kalinga"/>
+        <a:font script="Mlym" typeface="Kartika"/>
+        <a:font script="Laoo" typeface="DokChampa"/>
+        <a:font script="Sinh" typeface="Iskoola Pota"/>
+        <a:font script="Mong" typeface="Mongolian Baiti"/>
+        <a:font script="Viet" typeface="Arial"/>
+        <a:font script="Uigh" typeface="Microsoft Uighur"/>
+        <a:font script="Geor" typeface="Sylfaen"/>
+      </a:minorFont>
+    </a:fontScheme>
+    <a:fmtScheme name="Office">
+      <a:fillStyleLst>
+        <a:solidFill>
+          <a:schemeClr val="phClr"/>
+        </a:solidFill>
+        <a:gradFill rotWithShape="1">
+          <a:gsLst>
+            <a:gs pos="0">
+              <a:schemeClr val="phClr">
+                <a:tint val="50000"/>
+                <a:satMod val="300000"/>
+              </a:schemeClr>
+            </a:gs>
+            <a:gs pos="35000">
+              <a:schemeClr val="phClr">
+                <a:tint val="37000"/>
+                <a:satMod val="300000"/>
+              </a:schemeClr>
+            </a:gs>
+            <a:gs pos="100000">
+              <a:schemeClr val="phClr">
+                <a:tint val="15000"/>
+                <a:satMod val="350000"/>
+              </a:schemeClr>
+            </a:gs>
+          </a:gsLst>
+          <a:lin ang="16200000" scaled="1"/>
+        </a:gradFill>
+        <a:gradFill rotWithShape="1">
+          <a:gsLst>
+            <a:gs pos="0">
+              <a:schemeClr val="phClr">
+                <a:tint val="100000"/>
+                <a:shade val="100000"/>
+                <a:satMod val="130000"/>
+              </a:schemeClr>
+            </a:gs>
+            <a:gs pos="100000">
+              <a:schemeClr val="phClr">
+                <a:tint val="50000"/>
+                <a:shade val="100000"/>
+                <a:satMod val="350000"/>
+              </a:schemeClr>
+            </a:gs>
+          </a:gsLst>
+          <a:lin ang="16200000" scaled="0"/>
+        </a:gradFill>
+      </a:fillStyleLst>
+      <a:lnStyleLst>
+        <a:ln w="9525" cap="flat" cmpd="sng" algn="ctr">
+          <a:solidFill>
+            <a:schemeClr val="phClr">
+              <a:shade val="95000"/>
+              <a:satMod val="105000"/>
+            </a:schemeClr>
+          </a:solidFill>
+          <a:prstDash val="solid"/>
+        </a:ln>
+        <a:ln w="25400" cap="flat" cmpd="sng" algn="ctr">
+          <a:solidFill>
+            <a:schemeClr val="phClr"/>
+          </a:solidFill>
+          <a:prstDash val="solid"/>
+        </a:ln>
+        <a:ln w="38100" cap="flat" cmpd="sng" algn="ctr">
+          <a:solidFill>
+            <a:schemeClr val="phClr"/>
+          </a:solidFill>
+          <a:prstDash val="solid"/>
+        </a:ln>
+      </a:lnStyleLst>
+      <a:effectStyleLst>
+        <a:effectStyle>
+          <a:effectLst>
+            <a:outerShdw blurRad="40000" dist="20000" dir="5400000" rotWithShape="0">
+              <a:srgbClr val="000000">
+                <a:alpha val="38000"/>
+              </a:srgbClr>
+            </a:outerShdw>
+          </a:effectLst>
+        </a:effectStyle>
+        <a:effectStyle>
+          <a:effectLst>
+            <a:outerShdw blurRad="40000" dist="23000" dir="5400000" rotWithShape="0">
+              <a:srgbClr val="000000">
+                <a:alpha val="35000"/>
+              </a:srgbClr>
+            </a:outerShdw>
+          </a:effectLst>
+        </a:effectStyle>
+        <a:effectStyle>
+          <a:effectLst>
+            <a:outerShdw blurRad="40000" dist="23000" dir="5400000" rotWithShape="0">
+              <a:srgbClr val="000000">
+                <a:alpha val="35000"/>
+              </a:srgbClr>
+            </a:outerShdw>
+          </a:effectLst>
+          <a:scene3d>
+            <a:camera prst="orthographicFront">
+              <a:rot lat="0" lon="0" rev="0"/>
+            </a:camera>
+            <a:lightRig rig="threePt" dir="t">
+              <a:rot lat="0" lon="0" rev="1200000"/>
+            </a:lightRig>
+          </a:scene3d>
+          <a:sp3d>
+            <a:bevelT w="63500" h="25400"/>
+          </a:sp3d>
+        </a:effectStyle>
+      </a:effectStyleLst>
+      <a:bgFillStyleLst>
+        <a:solidFill>
+          <a:schemeClr val="phClr"/>
+        </a:solidFill>
+        <a:gradFill rotWithShape="1">
+          <a:gsLst>
+            <a:gs pos="0">
+              <a:schemeClr val="phClr">
+                <a:tint val="40000"/>
+                <a:satMod val="350000"/>
+              </a:schemeClr>
+            </a:gs>
+            <a:gs pos="40000">
+              <a:schemeClr val="phClr">
+                <a:tint val="45000"/>
+                <a:shade val="99000"/>
+                <a:satMod val="350000"/>
+              </a:schemeClr>
+            </a:gs>
+            <a:gs pos="100000">
+              <a:schemeClr val="phClr">
+                <a:shade val="20000"/>
+                <a:satMod val="255000"/>
+              </a:schemeClr>
+            </a:gs>
+          </a:gsLst>
+          <a:path path="circle">
+            <a:fillToRect l="50000" t="-80000" r="50000" b="180000"/>
+          </a:path>
+        </a:gradFill>
+        <a:gradFill rotWithShape="1">
+          <a:gsLst>
+            <a:gs pos="0">
+              <a:schemeClr val="phClr">
+                <a:tint val="80000"/>
+                <a:satMod val="300000"/>
+              </a:schemeClr>
+            </a:gs>
+            <a:gs pos="100000">
+              <a:schemeClr val="phClr">
+                <a:shade val="30000"/>
+                <a:satMod val="200000"/>
+              </a:schemeClr>
+            </a:gs>
+          </a:gsLst>
+          <a:path path="circle">
+            <a:fillToRect l="50000" t="50000" r="50000" b="50000"/>
+          </a:path>
+        </a:gradFill>
+      </a:bgFillStyleLst>
+    </a:fmtScheme>
+  </a:themeElements>
+  <a:objectDefaults>
+    <a:spDef>
+      <a:spPr/>
+      <a:bodyPr/>
+      <a:lstStyle/>
+      <a:style>
+        <a:lnRef idx="1">
+          <a:schemeClr val="accent1"/>
+        </a:lnRef>
+        <a:fillRef idx="3">
+          <a:schemeClr val="accent1"/>
+        </a:fillRef>
+        <a:effectRef idx="2">
+          <a:schemeClr val="accent1"/>
+        </a:effectRef>
+        <a:fontRef idx="minor">
+          <a:schemeClr val="lt1"/>
+        </a:fontRef>
+      </a:style>
+    </a:spDef>
+    <a:lnDef>
+      <a:spPr/>
+      <a:bodyPr/>
+      <a:lstStyle/>
+      <a:style>
+        <a:lnRef idx="2">
+          <a:schemeClr val="accent1"/>
+        </a:lnRef>
+        <a:fillRef idx="0">
+          <a:schemeClr val="accent1"/>
+        </a:fillRef>
+        <a:effectRef idx="1">
+          <a:schemeClr val="accent1"/>
+        </a:effectRef>
+        <a:fontRef idx="minor">
+          <a:schemeClr val="tx1"/>
+        </a:fontRef>
+      </a:style>
+    </a:lnDef>
+  </a:objectDefaults>
+  <a:extraClrSchemeLst/>
+</a:theme>
 </file>
--- a/S1-CL2-Cloud-Disaster-Recovery/delivery/topic_07/Topic_07_Slides.pptx
+++ b/S1-CL2-Cloud-Disaster-Recovery/delivery/topic_07/Topic_07_Slides.pptx
@@ -6919,7 +6919,7 @@
                 </a:solidFill>
                 <a:latin typeface="Roboto"/>
               </a:rPr>
-              <a:t>Your own bugs are the best teacher — a bad `!Ref` or property tells you exactly what to fix.</a:t>
+              <a:t>Your own bugs are the best teacher — a bad !Ref or property tells you exactly what to fix.</a:t>
             </a:r>
           </a:p>
         </p:txBody>
@@ -8574,7 +8574,7 @@
                 </a:solidFill>
                 <a:latin typeface="Roboto"/>
               </a:rPr>
-              <a:t>You still deploy to us-east-1 in the lab — `[scenario: ap-southeast-2 (Sydney) | deploy: us-east-1]`.</a:t>
+              <a:t>You still deploy to us-east-1 in the lab — [scenario: ap-southeast-2 (Sydney) | deploy: us-east-1].</a:t>
             </a:r>
           </a:p>
           <a:p>
